--- a/docs/v2技术架构.pptx
+++ b/docs/v2技术架构.pptx
@@ -4817,7 +4817,7 @@
             <a:pPr algn="ctr"/>
             <a:r>
               <a:rPr lang="zh-CN" altLang="en-US"/>
-              <a:t>通用模型</a:t>
+              <a:t>统一</a:t>
             </a:r>
             <a:r>
               <a:rPr lang="zh-CN" altLang="en-US"/>
@@ -4932,9 +4932,17 @@
             <a:pPr algn="ctr"/>
             <a:r>
               <a:rPr lang="en-US" altLang="zh-CN"/>
-              <a:t>LLM Base</a:t>
-            </a:r>
-            <a:endParaRPr lang="en-US" altLang="zh-CN"/>
+              <a:t>LLM</a:t>
+            </a:r>
+            <a:r>
+              <a:rPr lang="zh-CN" altLang="en-US"/>
+              <a:t>基础服务</a:t>
+            </a:r>
+            <a:r>
+              <a:rPr lang="zh-CN" altLang="en-US"/>
+              <a:t>层</a:t>
+            </a:r>
+            <a:endParaRPr lang="zh-CN" altLang="en-US"/>
           </a:p>
         </p:txBody>
       </p:sp>
